--- a/docs/pptx/entire/ritu-entire-ratio-by-age70.pptx
+++ b/docs/pptx/entire/ritu-entire-ratio-by-age70.pptx
@@ -7600,7 +7600,7 @@
                     <a:pt x="0" y="2670024"/>
                   </a:moveTo>
                   <a:lnTo>
-                    <a:pt x="13384" y="2663950"/>
+                    <a:pt x="13384" y="2663951"/>
                   </a:lnTo>
                   <a:lnTo>
                     <a:pt x="26769" y="2657656"/>
@@ -7618,7 +7618,7 @@
                     <a:pt x="80308" y="2629954"/>
                   </a:lnTo>
                   <a:lnTo>
-                    <a:pt x="93693" y="2622464"/>
+                    <a:pt x="93693" y="2622465"/>
                   </a:lnTo>
                   <a:lnTo>
                     <a:pt x="107078" y="2614703"/>
@@ -7636,13 +7636,13 @@
                     <a:pt x="160617" y="2581723"/>
                   </a:lnTo>
                   <a:lnTo>
-                    <a:pt x="174002" y="2573006"/>
-                  </a:lnTo>
-                  <a:lnTo>
-                    <a:pt x="187387" y="2564148"/>
-                  </a:lnTo>
-                  <a:lnTo>
-                    <a:pt x="200772" y="2555158"/>
+                    <a:pt x="174002" y="2573007"/>
+                  </a:lnTo>
+                  <a:lnTo>
+                    <a:pt x="187387" y="2564149"/>
+                  </a:lnTo>
+                  <a:lnTo>
+                    <a:pt x="200772" y="2555159"/>
                   </a:lnTo>
                   <a:lnTo>
                     <a:pt x="214157" y="2546021"/>
@@ -7669,7 +7669,7 @@
                     <a:pt x="307851" y="2480125"/>
                   </a:lnTo>
                   <a:lnTo>
-                    <a:pt x="321235" y="2470655"/>
+                    <a:pt x="321235" y="2470656"/>
                   </a:lnTo>
                   <a:lnTo>
                     <a:pt x="334620" y="2461245"/>
@@ -7699,7 +7699,7 @@
                     <a:pt x="441699" y="2389467"/>
                   </a:lnTo>
                   <a:lnTo>
-                    <a:pt x="455084" y="2381132"/>
+                    <a:pt x="455084" y="2381133"/>
                   </a:lnTo>
                   <a:lnTo>
                     <a:pt x="468469" y="2372941"/>
@@ -7720,7 +7720,7 @@
                     <a:pt x="535393" y="2334196"/>
                   </a:lnTo>
                   <a:lnTo>
-                    <a:pt x="548778" y="2326818"/>
+                    <a:pt x="548778" y="2326819"/>
                   </a:lnTo>
                   <a:lnTo>
                     <a:pt x="562162" y="2319560"/>
@@ -7735,7 +7735,7 @@
                     <a:pt x="602317" y="2298094"/>
                   </a:lnTo>
                   <a:lnTo>
-                    <a:pt x="615702" y="2290975"/>
+                    <a:pt x="615702" y="2290976"/>
                   </a:lnTo>
                   <a:lnTo>
                     <a:pt x="629087" y="2283821"/>
@@ -7759,7 +7759,7 @@
                     <a:pt x="709396" y="2238520"/>
                   </a:lnTo>
                   <a:lnTo>
-                    <a:pt x="722780" y="2230295"/>
+                    <a:pt x="722780" y="2230296"/>
                   </a:lnTo>
                   <a:lnTo>
                     <a:pt x="736165" y="2221688"/>
@@ -7771,13 +7771,13 @@
                     <a:pt x="762935" y="2203522"/>
                   </a:lnTo>
                   <a:lnTo>
-                    <a:pt x="776320" y="2193920"/>
+                    <a:pt x="776320" y="2193921"/>
                   </a:lnTo>
                   <a:lnTo>
                     <a:pt x="789705" y="2183806"/>
                   </a:lnTo>
                   <a:lnTo>
-                    <a:pt x="803089" y="2173226"/>
+                    <a:pt x="803089" y="2173227"/>
                   </a:lnTo>
                   <a:lnTo>
                     <a:pt x="816474" y="2162206"/>
@@ -7789,10 +7789,10 @@
                     <a:pt x="843244" y="2138672"/>
                   </a:lnTo>
                   <a:lnTo>
-                    <a:pt x="856629" y="2125996"/>
-                  </a:lnTo>
-                  <a:lnTo>
-                    <a:pt x="870014" y="2112801"/>
+                    <a:pt x="856629" y="2125997"/>
+                  </a:lnTo>
+                  <a:lnTo>
+                    <a:pt x="870014" y="2112802"/>
                   </a:lnTo>
                   <a:lnTo>
                     <a:pt x="883398" y="2099078"/>
@@ -7801,10 +7801,10 @@
                     <a:pt x="896783" y="2084774"/>
                   </a:lnTo>
                   <a:lnTo>
-                    <a:pt x="910168" y="2069722"/>
-                  </a:lnTo>
-                  <a:lnTo>
-                    <a:pt x="923553" y="2054115"/>
+                    <a:pt x="910168" y="2069723"/>
+                  </a:lnTo>
+                  <a:lnTo>
+                    <a:pt x="923553" y="2054116"/>
                   </a:lnTo>
                   <a:lnTo>
                     <a:pt x="936938" y="2037952"/>
@@ -7816,7 +7816,7 @@
                     <a:pt x="963707" y="2003741"/>
                   </a:lnTo>
                   <a:lnTo>
-                    <a:pt x="977092" y="1985677"/>
+                    <a:pt x="977092" y="1985678"/>
                   </a:lnTo>
                   <a:lnTo>
                     <a:pt x="990477" y="1967075"/>
@@ -7837,7 +7837,7 @@
                     <a:pt x="1057401" y="1865619"/>
                   </a:lnTo>
                   <a:lnTo>
-                    <a:pt x="1070786" y="1843797"/>
+                    <a:pt x="1070786" y="1843798"/>
                   </a:lnTo>
                   <a:lnTo>
                     <a:pt x="1084171" y="1821435"/>
@@ -7849,28 +7849,28 @@
                     <a:pt x="1110941" y="1775563"/>
                   </a:lnTo>
                   <a:lnTo>
-                    <a:pt x="1124325" y="1752087"/>
-                  </a:lnTo>
-                  <a:lnTo>
-                    <a:pt x="1137710" y="1728161"/>
-                  </a:lnTo>
-                  <a:lnTo>
-                    <a:pt x="1151095" y="1703953"/>
+                    <a:pt x="1124325" y="1752088"/>
+                  </a:lnTo>
+                  <a:lnTo>
+                    <a:pt x="1137710" y="1728162"/>
+                  </a:lnTo>
+                  <a:lnTo>
+                    <a:pt x="1151095" y="1703954"/>
                   </a:lnTo>
                   <a:lnTo>
                     <a:pt x="1164480" y="1679483"/>
                   </a:lnTo>
                   <a:lnTo>
-                    <a:pt x="1177865" y="1654769"/>
-                  </a:lnTo>
-                  <a:lnTo>
-                    <a:pt x="1191250" y="1629773"/>
+                    <a:pt x="1177865" y="1654770"/>
+                  </a:lnTo>
+                  <a:lnTo>
+                    <a:pt x="1191250" y="1629774"/>
                   </a:lnTo>
                   <a:lnTo>
                     <a:pt x="1204634" y="1604575"/>
                   </a:lnTo>
                   <a:lnTo>
-                    <a:pt x="1218019" y="1579215"/>
+                    <a:pt x="1218019" y="1579216"/>
                   </a:lnTo>
                   <a:lnTo>
                     <a:pt x="1231404" y="1553711"/>
@@ -7879,7 +7879,7 @@
                     <a:pt x="1244789" y="1528058"/>
                   </a:lnTo>
                   <a:lnTo>
-                    <a:pt x="1258174" y="1502280"/>
+                    <a:pt x="1258174" y="1502281"/>
                   </a:lnTo>
                   <a:lnTo>
                     <a:pt x="1271559" y="1476420"/>
@@ -7900,10 +7900,10 @@
                     <a:pt x="1338483" y="1346191"/>
                   </a:lnTo>
                   <a:lnTo>
-                    <a:pt x="1351868" y="1320025"/>
-                  </a:lnTo>
-                  <a:lnTo>
-                    <a:pt x="1365252" y="1293821"/>
+                    <a:pt x="1351868" y="1320026"/>
+                  </a:lnTo>
+                  <a:lnTo>
+                    <a:pt x="1365252" y="1293822"/>
                   </a:lnTo>
                   <a:lnTo>
                     <a:pt x="1378637" y="1267589"/>
@@ -7912,10 +7912,10 @@
                     <a:pt x="1392022" y="1241327"/>
                   </a:lnTo>
                   <a:lnTo>
-                    <a:pt x="1405407" y="1215034"/>
-                  </a:lnTo>
-                  <a:lnTo>
-                    <a:pt x="1418792" y="1188698"/>
+                    <a:pt x="1405407" y="1215035"/>
+                  </a:lnTo>
+                  <a:lnTo>
+                    <a:pt x="1418792" y="1188699"/>
                   </a:lnTo>
                   <a:lnTo>
                     <a:pt x="1432177" y="1162315"/>
@@ -7930,13 +7930,13 @@
                     <a:pt x="1472331" y="1082874"/>
                   </a:lnTo>
                   <a:lnTo>
-                    <a:pt x="1485716" y="1056262"/>
-                  </a:lnTo>
-                  <a:lnTo>
-                    <a:pt x="1499101" y="1029590"/>
-                  </a:lnTo>
-                  <a:lnTo>
-                    <a:pt x="1512486" y="1002857"/>
+                    <a:pt x="1485716" y="1056263"/>
+                  </a:lnTo>
+                  <a:lnTo>
+                    <a:pt x="1499101" y="1029591"/>
+                  </a:lnTo>
+                  <a:lnTo>
+                    <a:pt x="1512486" y="1002858"/>
                   </a:lnTo>
                   <a:lnTo>
                     <a:pt x="1525870" y="976063"/>
@@ -7945,7 +7945,7 @@
                     <a:pt x="1539255" y="949186"/>
                   </a:lnTo>
                   <a:lnTo>
-                    <a:pt x="1552640" y="922258"/>
+                    <a:pt x="1552640" y="922259"/>
                   </a:lnTo>
                   <a:lnTo>
                     <a:pt x="1566025" y="895288"/>
@@ -7954,13 +7954,13 @@
                     <a:pt x="1579410" y="868283"/>
                   </a:lnTo>
                   <a:lnTo>
-                    <a:pt x="1592795" y="841252"/>
+                    <a:pt x="1592795" y="841253"/>
                   </a:lnTo>
                   <a:lnTo>
                     <a:pt x="1606179" y="814229"/>
                   </a:lnTo>
                   <a:lnTo>
-                    <a:pt x="1619564" y="787231"/>
+                    <a:pt x="1619564" y="787232"/>
                   </a:lnTo>
                   <a:lnTo>
                     <a:pt x="1632949" y="760280"/>
@@ -7978,7 +7978,7 @@
                     <a:pt x="1686488" y="653772"/>
                   </a:lnTo>
                   <a:lnTo>
-                    <a:pt x="1699873" y="627640"/>
+                    <a:pt x="1699873" y="627641"/>
                   </a:lnTo>
                   <a:lnTo>
                     <a:pt x="1713258" y="601900"/>
@@ -7993,7 +7993,7 @@
                     <a:pt x="1753413" y="526911"/>
                   </a:lnTo>
                   <a:lnTo>
-                    <a:pt x="1766797" y="502999"/>
+                    <a:pt x="1766797" y="503000"/>
                   </a:lnTo>
                   <a:lnTo>
                     <a:pt x="1780182" y="479688"/>
@@ -8077,7 +8077,7 @@
                     <a:pt x="2128188" y="213138"/>
                   </a:lnTo>
                   <a:lnTo>
-                    <a:pt x="2141573" y="215513"/>
+                    <a:pt x="2141573" y="215514"/>
                   </a:lnTo>
                   <a:lnTo>
                     <a:pt x="2154958" y="218310"/>
@@ -8128,7 +8128,7 @@
                     <a:pt x="2355730" y="251906"/>
                   </a:lnTo>
                   <a:lnTo>
-                    <a:pt x="2369115" y="250053"/>
+                    <a:pt x="2369115" y="250054"/>
                   </a:lnTo>
                   <a:lnTo>
                     <a:pt x="2382500" y="247476"/>
@@ -8242,7 +8242,7 @@
                     <a:pt x="2864354" y="15109"/>
                   </a:lnTo>
                   <a:lnTo>
-                    <a:pt x="2877739" y="22077"/>
+                    <a:pt x="2877739" y="22078"/>
                   </a:lnTo>
                   <a:lnTo>
                     <a:pt x="2891123" y="30225"/>
@@ -8266,7 +8266,7 @@
                     <a:pt x="2971432" y="105153"/>
                   </a:lnTo>
                   <a:lnTo>
-                    <a:pt x="2984817" y="121530"/>
+                    <a:pt x="2984817" y="121531"/>
                   </a:lnTo>
                   <a:lnTo>
                     <a:pt x="2998202" y="138747"/>
@@ -8275,19 +8275,19 @@
                     <a:pt x="3011587" y="156756"/>
                   </a:lnTo>
                   <a:lnTo>
-                    <a:pt x="3024972" y="175653"/>
-                  </a:lnTo>
-                  <a:lnTo>
-                    <a:pt x="3038357" y="195319"/>
-                  </a:lnTo>
-                  <a:lnTo>
-                    <a:pt x="3051741" y="215548"/>
+                    <a:pt x="3024972" y="175654"/>
+                  </a:lnTo>
+                  <a:lnTo>
+                    <a:pt x="3038357" y="195320"/>
+                  </a:lnTo>
+                  <a:lnTo>
+                    <a:pt x="3051741" y="215549"/>
                   </a:lnTo>
                   <a:lnTo>
                     <a:pt x="3065126" y="236287"/>
                   </a:lnTo>
                   <a:lnTo>
-                    <a:pt x="3078511" y="257517"/>
+                    <a:pt x="3078511" y="257518"/>
                   </a:lnTo>
                   <a:lnTo>
                     <a:pt x="3091896" y="279219"/>
@@ -8299,52 +8299,52 @@
                     <a:pt x="3118666" y="323375"/>
                   </a:lnTo>
                   <a:lnTo>
-                    <a:pt x="3132050" y="345726"/>
+                    <a:pt x="3132050" y="345727"/>
                   </a:lnTo>
                   <a:lnTo>
                     <a:pt x="3145435" y="368190"/>
                   </a:lnTo>
                   <a:lnTo>
-                    <a:pt x="3158820" y="390649"/>
-                  </a:lnTo>
-                  <a:lnTo>
-                    <a:pt x="3172205" y="413059"/>
+                    <a:pt x="3158820" y="390650"/>
+                  </a:lnTo>
+                  <a:lnTo>
+                    <a:pt x="3172205" y="413060"/>
                   </a:lnTo>
                   <a:lnTo>
                     <a:pt x="3185590" y="435377"/>
                   </a:lnTo>
                   <a:lnTo>
-                    <a:pt x="3198975" y="457497"/>
-                  </a:lnTo>
-                  <a:lnTo>
-                    <a:pt x="3212359" y="479367"/>
-                  </a:lnTo>
-                  <a:lnTo>
-                    <a:pt x="3225744" y="500979"/>
+                    <a:pt x="3198975" y="457498"/>
+                  </a:lnTo>
+                  <a:lnTo>
+                    <a:pt x="3212359" y="479368"/>
+                  </a:lnTo>
+                  <a:lnTo>
+                    <a:pt x="3225744" y="500980"/>
                   </a:lnTo>
                   <a:lnTo>
                     <a:pt x="3239129" y="522304"/>
                   </a:lnTo>
                   <a:lnTo>
-                    <a:pt x="3252514" y="543254"/>
-                  </a:lnTo>
-                  <a:lnTo>
-                    <a:pt x="3265899" y="563742"/>
-                  </a:lnTo>
-                  <a:lnTo>
-                    <a:pt x="3279284" y="583842"/>
-                  </a:lnTo>
-                  <a:lnTo>
-                    <a:pt x="3292668" y="603540"/>
-                  </a:lnTo>
-                  <a:lnTo>
-                    <a:pt x="3306053" y="622809"/>
-                  </a:lnTo>
-                  <a:lnTo>
-                    <a:pt x="3319438" y="641478"/>
-                  </a:lnTo>
-                  <a:lnTo>
-                    <a:pt x="3332823" y="659715"/>
+                    <a:pt x="3252514" y="543255"/>
+                  </a:lnTo>
+                  <a:lnTo>
+                    <a:pt x="3265899" y="563743"/>
+                  </a:lnTo>
+                  <a:lnTo>
+                    <a:pt x="3279284" y="583843"/>
+                  </a:lnTo>
+                  <a:lnTo>
+                    <a:pt x="3292668" y="603541"/>
+                  </a:lnTo>
+                  <a:lnTo>
+                    <a:pt x="3306053" y="622810"/>
+                  </a:lnTo>
+                  <a:lnTo>
+                    <a:pt x="3319438" y="641479"/>
+                  </a:lnTo>
+                  <a:lnTo>
+                    <a:pt x="3332823" y="659716"/>
                   </a:lnTo>
                   <a:lnTo>
                     <a:pt x="3346208" y="677523"/>
@@ -8353,7 +8353,7 @@
                     <a:pt x="3359593" y="694904"/>
                   </a:lnTo>
                   <a:lnTo>
-                    <a:pt x="3372977" y="711726"/>
+                    <a:pt x="3372977" y="711727"/>
                   </a:lnTo>
                   <a:lnTo>
                     <a:pt x="3386362" y="728117"/>
@@ -8362,10 +8362,10 @@
                     <a:pt x="3399747" y="744129"/>
                   </a:lnTo>
                   <a:lnTo>
-                    <a:pt x="3413132" y="759778"/>
-                  </a:lnTo>
-                  <a:lnTo>
-                    <a:pt x="3426517" y="775017"/>
+                    <a:pt x="3413132" y="759779"/>
+                  </a:lnTo>
+                  <a:lnTo>
+                    <a:pt x="3426517" y="775018"/>
                   </a:lnTo>
                   <a:lnTo>
                     <a:pt x="3439902" y="789891"/>
@@ -8386,10 +8386,10 @@
                     <a:pt x="3506826" y="860666"/>
                   </a:lnTo>
                   <a:lnTo>
-                    <a:pt x="3520211" y="874342"/>
-                  </a:lnTo>
-                  <a:lnTo>
-                    <a:pt x="3533595" y="887945"/>
+                    <a:pt x="3520211" y="874343"/>
+                  </a:lnTo>
+                  <a:lnTo>
+                    <a:pt x="3533595" y="887946"/>
                   </a:lnTo>
                   <a:lnTo>
                     <a:pt x="3546980" y="901506"/>
@@ -8398,22 +8398,22 @@
                     <a:pt x="3560365" y="915080"/>
                   </a:lnTo>
                   <a:lnTo>
-                    <a:pt x="3573750" y="928690"/>
-                  </a:lnTo>
-                  <a:lnTo>
-                    <a:pt x="3587135" y="942358"/>
-                  </a:lnTo>
-                  <a:lnTo>
-                    <a:pt x="3600520" y="956138"/>
-                  </a:lnTo>
-                  <a:lnTo>
-                    <a:pt x="3613904" y="970055"/>
+                    <a:pt x="3573750" y="928691"/>
+                  </a:lnTo>
+                  <a:lnTo>
+                    <a:pt x="3587135" y="942359"/>
+                  </a:lnTo>
+                  <a:lnTo>
+                    <a:pt x="3600520" y="956139"/>
+                  </a:lnTo>
+                  <a:lnTo>
+                    <a:pt x="3613904" y="970056"/>
                   </a:lnTo>
                   <a:lnTo>
                     <a:pt x="3627289" y="984109"/>
                   </a:lnTo>
                   <a:lnTo>
-                    <a:pt x="3640674" y="998311"/>
+                    <a:pt x="3640674" y="998312"/>
                   </a:lnTo>
                   <a:lnTo>
                     <a:pt x="3654059" y="1012702"/>
@@ -8422,13 +8422,13 @@
                     <a:pt x="3667444" y="1027319"/>
                   </a:lnTo>
                   <a:lnTo>
-                    <a:pt x="3680829" y="1042119"/>
+                    <a:pt x="3680829" y="1042120"/>
                   </a:lnTo>
                   <a:lnTo>
                     <a:pt x="3694213" y="1057105"/>
                   </a:lnTo>
                   <a:lnTo>
-                    <a:pt x="3707598" y="1072281"/>
+                    <a:pt x="3707598" y="1072282"/>
                   </a:lnTo>
                   <a:lnTo>
                     <a:pt x="3720983" y="1087715"/>
@@ -8455,7 +8455,7 @@
                     <a:pt x="3814677" y="1200207"/>
                   </a:lnTo>
                   <a:lnTo>
-                    <a:pt x="3828062" y="1216745"/>
+                    <a:pt x="3828062" y="1216746"/>
                   </a:lnTo>
                   <a:lnTo>
                     <a:pt x="3841447" y="1233342"/>
@@ -8506,10 +8506,10 @@
                     <a:pt x="4042219" y="1477611"/>
                   </a:lnTo>
                   <a:lnTo>
-                    <a:pt x="4055604" y="1493262"/>
-                  </a:lnTo>
-                  <a:lnTo>
-                    <a:pt x="4068989" y="1508846"/>
+                    <a:pt x="4055604" y="1493263"/>
+                  </a:lnTo>
+                  <a:lnTo>
+                    <a:pt x="4068989" y="1508847"/>
                   </a:lnTo>
                   <a:lnTo>
                     <a:pt x="4082374" y="1524393"/>
@@ -8530,7 +8530,7 @@
                     <a:pt x="4149298" y="1602005"/>
                   </a:lnTo>
                   <a:lnTo>
-                    <a:pt x="4162683" y="1617608"/>
+                    <a:pt x="4162683" y="1617609"/>
                   </a:lnTo>
                   <a:lnTo>
                     <a:pt x="4176067" y="1633293"/>
@@ -8557,7 +8557,7 @@
                     <a:pt x="4269761" y="1745913"/>
                   </a:lnTo>
                   <a:lnTo>
-                    <a:pt x="4283146" y="1762472"/>
+                    <a:pt x="4283146" y="1762473"/>
                   </a:lnTo>
                   <a:lnTo>
                     <a:pt x="4296531" y="1779180"/>
@@ -8569,16 +8569,16 @@
                     <a:pt x="4323301" y="1812886"/>
                   </a:lnTo>
                   <a:lnTo>
-                    <a:pt x="4336685" y="1829870"/>
-                  </a:lnTo>
-                  <a:lnTo>
-                    <a:pt x="4350070" y="1846948"/>
-                  </a:lnTo>
-                  <a:lnTo>
-                    <a:pt x="4363455" y="1864074"/>
-                  </a:lnTo>
-                  <a:lnTo>
-                    <a:pt x="4376840" y="1881230"/>
+                    <a:pt x="4336685" y="1829871"/>
+                  </a:lnTo>
+                  <a:lnTo>
+                    <a:pt x="4350070" y="1846949"/>
+                  </a:lnTo>
+                  <a:lnTo>
+                    <a:pt x="4363455" y="1864075"/>
+                  </a:lnTo>
+                  <a:lnTo>
+                    <a:pt x="4376840" y="1881231"/>
                   </a:lnTo>
                   <a:lnTo>
                     <a:pt x="4390225" y="1898402"/>
@@ -8590,7 +8590,7 @@
                     <a:pt x="4416994" y="1932680"/>
                   </a:lnTo>
                   <a:lnTo>
-                    <a:pt x="4430379" y="1949734"/>
+                    <a:pt x="4430379" y="1949735"/>
                   </a:lnTo>
                   <a:lnTo>
                     <a:pt x="4443764" y="1966708"/>
@@ -8614,7 +8614,7 @@
                     <a:pt x="4524073" y="2064980"/>
                   </a:lnTo>
                   <a:lnTo>
-                    <a:pt x="4537458" y="2080506"/>
+                    <a:pt x="4537458" y="2080507"/>
                   </a:lnTo>
                   <a:lnTo>
                     <a:pt x="4550843" y="2095759"/>
@@ -8641,10 +8641,10 @@
                     <a:pt x="4644537" y="2192671"/>
                   </a:lnTo>
                   <a:lnTo>
-                    <a:pt x="4657921" y="2205006"/>
-                  </a:lnTo>
-                  <a:lnTo>
-                    <a:pt x="4671306" y="2216996"/>
+                    <a:pt x="4657921" y="2205007"/>
+                  </a:lnTo>
+                  <a:lnTo>
+                    <a:pt x="4671306" y="2216997"/>
                   </a:lnTo>
                   <a:lnTo>
                     <a:pt x="4684691" y="2228620"/>
@@ -8671,13 +8671,13 @@
                     <a:pt x="4778385" y="2300187"/>
                   </a:lnTo>
                   <a:lnTo>
-                    <a:pt x="4791770" y="2309295"/>
+                    <a:pt x="4791770" y="2309296"/>
                   </a:lnTo>
                   <a:lnTo>
                     <a:pt x="4805155" y="2318145"/>
                   </a:lnTo>
                   <a:lnTo>
-                    <a:pt x="4818539" y="2326782"/>
+                    <a:pt x="4818539" y="2326783"/>
                   </a:lnTo>
                   <a:lnTo>
                     <a:pt x="4831924" y="2335262"/>
@@ -8689,13 +8689,13 @@
                     <a:pt x="4858694" y="2351794"/>
                   </a:lnTo>
                   <a:lnTo>
-                    <a:pt x="4872079" y="2359861"/>
+                    <a:pt x="4872079" y="2359862"/>
                   </a:lnTo>
                   <a:lnTo>
                     <a:pt x="4885464" y="2367853"/>
                   </a:lnTo>
                   <a:lnTo>
-                    <a:pt x="4898848" y="2375781"/>
+                    <a:pt x="4898848" y="2375782"/>
                   </a:lnTo>
                   <a:lnTo>
                     <a:pt x="4912233" y="2383660"/>
@@ -8713,10 +8713,10 @@
                     <a:pt x="4965773" y="2414970"/>
                   </a:lnTo>
                   <a:lnTo>
-                    <a:pt x="4979157" y="2422818"/>
-                  </a:lnTo>
-                  <a:lnTo>
-                    <a:pt x="4992542" y="2430694"/>
+                    <a:pt x="4979157" y="2422819"/>
+                  </a:lnTo>
+                  <a:lnTo>
+                    <a:pt x="4992542" y="2430695"/>
                   </a:lnTo>
                   <a:lnTo>
                     <a:pt x="5005927" y="2438599"/>
@@ -8731,7 +8731,7 @@
                     <a:pt x="5046082" y="2462524"/>
                   </a:lnTo>
                   <a:lnTo>
-                    <a:pt x="5059466" y="2470568"/>
+                    <a:pt x="5059466" y="2470569"/>
                   </a:lnTo>
                   <a:lnTo>
                     <a:pt x="5072851" y="2478639"/>
@@ -8743,28 +8743,28 @@
                     <a:pt x="5099621" y="2494849"/>
                   </a:lnTo>
                   <a:lnTo>
-                    <a:pt x="5113006" y="2502968"/>
+                    <a:pt x="5113006" y="2502969"/>
                   </a:lnTo>
                   <a:lnTo>
                     <a:pt x="5126391" y="2511086"/>
                   </a:lnTo>
                   <a:lnTo>
-                    <a:pt x="5139775" y="2519194"/>
-                  </a:lnTo>
-                  <a:lnTo>
-                    <a:pt x="5153160" y="2527273"/>
+                    <a:pt x="5139775" y="2519195"/>
+                  </a:lnTo>
+                  <a:lnTo>
+                    <a:pt x="5153160" y="2527274"/>
                   </a:lnTo>
                   <a:lnTo>
                     <a:pt x="5166545" y="2535315"/>
                   </a:lnTo>
                   <a:lnTo>
-                    <a:pt x="5179930" y="2543311"/>
+                    <a:pt x="5179930" y="2543312"/>
                   </a:lnTo>
                   <a:lnTo>
                     <a:pt x="5193315" y="2551255"/>
                   </a:lnTo>
                   <a:lnTo>
-                    <a:pt x="5206700" y="2559116"/>
+                    <a:pt x="5206700" y="2559117"/>
                   </a:lnTo>
                   <a:lnTo>
                     <a:pt x="5220084" y="2566883"/>
@@ -8773,10 +8773,10 @@
                     <a:pt x="5233469" y="2574559"/>
                   </a:lnTo>
                   <a:lnTo>
-                    <a:pt x="5246854" y="2582136"/>
-                  </a:lnTo>
-                  <a:lnTo>
-                    <a:pt x="5260239" y="2589592"/>
+                    <a:pt x="5246854" y="2582137"/>
+                  </a:lnTo>
+                  <a:lnTo>
+                    <a:pt x="5260239" y="2589593"/>
                   </a:lnTo>
                   <a:lnTo>
                     <a:pt x="5273624" y="2596890"/>
@@ -8791,7 +8791,7 @@
                     <a:pt x="5313778" y="2617976"/>
                   </a:lnTo>
                   <a:lnTo>
-                    <a:pt x="5327163" y="2624648"/>
+                    <a:pt x="5327163" y="2624649"/>
                   </a:lnTo>
                   <a:lnTo>
                     <a:pt x="5340548" y="2631162"/>
@@ -8803,7 +8803,7 @@
                     <a:pt x="5367318" y="2643702"/>
                   </a:lnTo>
                   <a:lnTo>
-                    <a:pt x="5380702" y="2649669"/>
+                    <a:pt x="5380702" y="2649670"/>
                   </a:lnTo>
                   <a:lnTo>
                     <a:pt x="5394087" y="2655444"/>
@@ -8818,16 +8818,16 @@
                     <a:pt x="5434242" y="2671703"/>
                   </a:lnTo>
                   <a:lnTo>
-                    <a:pt x="5447627" y="2676713"/>
+                    <a:pt x="5447627" y="2676714"/>
                   </a:lnTo>
                   <a:lnTo>
                     <a:pt x="5461011" y="2681554"/>
                   </a:lnTo>
                   <a:lnTo>
-                    <a:pt x="5474396" y="2686225"/>
-                  </a:lnTo>
-                  <a:lnTo>
-                    <a:pt x="5487781" y="2690720"/>
+                    <a:pt x="5474396" y="2686226"/>
+                  </a:lnTo>
+                  <a:lnTo>
+                    <a:pt x="5487781" y="2690721"/>
                   </a:lnTo>
                   <a:lnTo>
                     <a:pt x="5501166" y="2694990"/>
@@ -8851,16 +8851,16 @@
                     <a:pt x="5581475" y="2717186"/>
                   </a:lnTo>
                   <a:lnTo>
-                    <a:pt x="5594860" y="2720347"/>
-                  </a:lnTo>
-                  <a:lnTo>
-                    <a:pt x="5608245" y="2723343"/>
-                  </a:lnTo>
-                  <a:lnTo>
-                    <a:pt x="5621629" y="2726186"/>
-                  </a:lnTo>
-                  <a:lnTo>
-                    <a:pt x="5635014" y="2728905"/>
+                    <a:pt x="5594860" y="2720348"/>
+                  </a:lnTo>
+                  <a:lnTo>
+                    <a:pt x="5608245" y="2723344"/>
+                  </a:lnTo>
+                  <a:lnTo>
+                    <a:pt x="5621629" y="2726187"/>
+                  </a:lnTo>
+                  <a:lnTo>
+                    <a:pt x="5635014" y="2728906"/>
                   </a:lnTo>
                   <a:lnTo>
                     <a:pt x="5648399" y="2731504"/>
@@ -8869,16 +8869,16 @@
                     <a:pt x="5661784" y="2733972"/>
                   </a:lnTo>
                   <a:lnTo>
-                    <a:pt x="5675169" y="2736291"/>
-                  </a:lnTo>
-                  <a:lnTo>
-                    <a:pt x="5688554" y="2738503"/>
+                    <a:pt x="5675169" y="2736292"/>
+                  </a:lnTo>
+                  <a:lnTo>
+                    <a:pt x="5688554" y="2738504"/>
                   </a:lnTo>
                   <a:lnTo>
                     <a:pt x="5701938" y="2740611"/>
                   </a:lnTo>
                   <a:lnTo>
-                    <a:pt x="5715323" y="2742616"/>
+                    <a:pt x="5715323" y="2742617"/>
                   </a:lnTo>
                   <a:lnTo>
                     <a:pt x="5728708" y="2744483"/>
@@ -8893,13 +8893,13 @@
                     <a:pt x="5768863" y="2749534"/>
                   </a:lnTo>
                   <a:lnTo>
-                    <a:pt x="5782247" y="2751019"/>
-                  </a:lnTo>
-                  <a:lnTo>
-                    <a:pt x="5795632" y="2752414"/>
-                  </a:lnTo>
-                  <a:lnTo>
-                    <a:pt x="5809017" y="2753732"/>
+                    <a:pt x="5782247" y="2751020"/>
+                  </a:lnTo>
+                  <a:lnTo>
+                    <a:pt x="5795632" y="2752415"/>
+                  </a:lnTo>
+                  <a:lnTo>
+                    <a:pt x="5809017" y="2753733"/>
                   </a:lnTo>
                   <a:lnTo>
                     <a:pt x="5822402" y="2754976"/>
@@ -8917,13 +8917,13 @@
                     <a:pt x="5875941" y="2759163"/>
                   </a:lnTo>
                   <a:lnTo>
-                    <a:pt x="5889326" y="2760045"/>
-                  </a:lnTo>
-                  <a:lnTo>
-                    <a:pt x="5902711" y="2760849"/>
-                  </a:lnTo>
-                  <a:lnTo>
-                    <a:pt x="5916096" y="2761600"/>
+                    <a:pt x="5889326" y="2760046"/>
+                  </a:lnTo>
+                  <a:lnTo>
+                    <a:pt x="5902711" y="2760850"/>
+                  </a:lnTo>
+                  <a:lnTo>
+                    <a:pt x="5916096" y="2761601"/>
                   </a:lnTo>
                   <a:lnTo>
                     <a:pt x="5929481" y="2762300"/>
@@ -8953,13 +8953,13 @@
                     <a:pt x="6036559" y="2766188"/>
                   </a:lnTo>
                   <a:lnTo>
-                    <a:pt x="6049944" y="2766505"/>
-                  </a:lnTo>
-                  <a:lnTo>
-                    <a:pt x="6063329" y="2766792"/>
-                  </a:lnTo>
-                  <a:lnTo>
-                    <a:pt x="6076714" y="2767046"/>
+                    <a:pt x="6049944" y="2766506"/>
+                  </a:lnTo>
+                  <a:lnTo>
+                    <a:pt x="6063329" y="2766793"/>
+                  </a:lnTo>
+                  <a:lnTo>
+                    <a:pt x="6076714" y="2767047"/>
                   </a:lnTo>
                   <a:lnTo>
                     <a:pt x="6090099" y="2767278"/>
@@ -8974,7 +8974,7 @@
                     <a:pt x="6130253" y="2767842"/>
                   </a:lnTo>
                   <a:lnTo>
-                    <a:pt x="6143638" y="2767990"/>
+                    <a:pt x="6143638" y="2767991"/>
                   </a:lnTo>
                   <a:lnTo>
                     <a:pt x="6157023" y="2768124"/>
@@ -8986,7 +8986,7 @@
                     <a:pt x="6183792" y="2768347"/>
                   </a:lnTo>
                   <a:lnTo>
-                    <a:pt x="6197177" y="2768438"/>
+                    <a:pt x="6197177" y="2768439"/>
                   </a:lnTo>
                   <a:lnTo>
                     <a:pt x="6210562" y="2768520"/>
@@ -9001,28 +9001,28 @@
                     <a:pt x="6250717" y="2768709"/>
                   </a:lnTo>
                   <a:lnTo>
-                    <a:pt x="6264101" y="2768756"/>
-                  </a:lnTo>
-                  <a:lnTo>
-                    <a:pt x="6277486" y="2768798"/>
+                    <a:pt x="6264101" y="2768757"/>
+                  </a:lnTo>
+                  <a:lnTo>
+                    <a:pt x="6277486" y="2768799"/>
                   </a:lnTo>
                   <a:lnTo>
                     <a:pt x="6290871" y="2768835"/>
                   </a:lnTo>
                   <a:lnTo>
-                    <a:pt x="6304256" y="2768865"/>
+                    <a:pt x="6304256" y="2768866"/>
                   </a:lnTo>
                   <a:lnTo>
                     <a:pt x="6317641" y="2768892"/>
                   </a:lnTo>
                   <a:lnTo>
-                    <a:pt x="6331026" y="2768915"/>
+                    <a:pt x="6331026" y="2768916"/>
                   </a:lnTo>
                   <a:lnTo>
                     <a:pt x="6344410" y="2768936"/>
                   </a:lnTo>
                   <a:lnTo>
-                    <a:pt x="6357795" y="2768952"/>
+                    <a:pt x="6357795" y="2768953"/>
                   </a:lnTo>
                   <a:lnTo>
                     <a:pt x="6371180" y="2768967"/>
@@ -9055,13 +9055,13 @@
                     <a:pt x="6491644" y="2769029"/>
                   </a:lnTo>
                   <a:lnTo>
-                    <a:pt x="6505028" y="2769031"/>
+                    <a:pt x="6505028" y="2769032"/>
                   </a:lnTo>
                   <a:lnTo>
                     <a:pt x="6518413" y="2769034"/>
                   </a:lnTo>
                   <a:lnTo>
-                    <a:pt x="6531798" y="2769035"/>
+                    <a:pt x="6531798" y="2769036"/>
                   </a:lnTo>
                   <a:lnTo>
                     <a:pt x="6545183" y="2769037"/>
@@ -9076,13 +9076,13 @@
                     <a:pt x="6585337" y="2769040"/>
                   </a:lnTo>
                   <a:lnTo>
-                    <a:pt x="6598722" y="2769040"/>
+                    <a:pt x="6598722" y="2769041"/>
                   </a:lnTo>
                   <a:lnTo>
                     <a:pt x="6612107" y="2769041"/>
                   </a:lnTo>
                   <a:lnTo>
-                    <a:pt x="6625492" y="2769041"/>
+                    <a:pt x="6625492" y="2769042"/>
                   </a:lnTo>
                   <a:lnTo>
                     <a:pt x="6638877" y="2769042"/>
@@ -9094,7 +9094,7 @@
                     <a:pt x="6665646" y="2769042"/>
                   </a:lnTo>
                   <a:lnTo>
-                    <a:pt x="6679031" y="2769042"/>
+                    <a:pt x="6679031" y="2769043"/>
                   </a:lnTo>
                   <a:lnTo>
                     <a:pt x="6692416" y="2769043"/>
@@ -10700,7 +10700,7 @@
                     <a:pt x="0" y="2670024"/>
                   </a:moveTo>
                   <a:lnTo>
-                    <a:pt x="13384" y="2663950"/>
+                    <a:pt x="13384" y="2663951"/>
                   </a:lnTo>
                   <a:lnTo>
                     <a:pt x="26769" y="2657656"/>
@@ -10718,7 +10718,7 @@
                     <a:pt x="80308" y="2629954"/>
                   </a:lnTo>
                   <a:lnTo>
-                    <a:pt x="93693" y="2622464"/>
+                    <a:pt x="93693" y="2622465"/>
                   </a:lnTo>
                   <a:lnTo>
                     <a:pt x="107078" y="2614703"/>
@@ -10736,13 +10736,13 @@
                     <a:pt x="160617" y="2581723"/>
                   </a:lnTo>
                   <a:lnTo>
-                    <a:pt x="174002" y="2573006"/>
-                  </a:lnTo>
-                  <a:lnTo>
-                    <a:pt x="187387" y="2564148"/>
-                  </a:lnTo>
-                  <a:lnTo>
-                    <a:pt x="200772" y="2555158"/>
+                    <a:pt x="174002" y="2573007"/>
+                  </a:lnTo>
+                  <a:lnTo>
+                    <a:pt x="187387" y="2564149"/>
+                  </a:lnTo>
+                  <a:lnTo>
+                    <a:pt x="200772" y="2555159"/>
                   </a:lnTo>
                   <a:lnTo>
                     <a:pt x="214157" y="2546021"/>
@@ -10769,7 +10769,7 @@
                     <a:pt x="307851" y="2480125"/>
                   </a:lnTo>
                   <a:lnTo>
-                    <a:pt x="321235" y="2470655"/>
+                    <a:pt x="321235" y="2470656"/>
                   </a:lnTo>
                   <a:lnTo>
                     <a:pt x="334620" y="2461245"/>
@@ -10799,7 +10799,7 @@
                     <a:pt x="441699" y="2389467"/>
                   </a:lnTo>
                   <a:lnTo>
-                    <a:pt x="455084" y="2381132"/>
+                    <a:pt x="455084" y="2381133"/>
                   </a:lnTo>
                   <a:lnTo>
                     <a:pt x="468469" y="2372941"/>
@@ -10820,7 +10820,7 @@
                     <a:pt x="535393" y="2334196"/>
                   </a:lnTo>
                   <a:lnTo>
-                    <a:pt x="548778" y="2326818"/>
+                    <a:pt x="548778" y="2326819"/>
                   </a:lnTo>
                   <a:lnTo>
                     <a:pt x="562162" y="2319560"/>
@@ -10835,7 +10835,7 @@
                     <a:pt x="602317" y="2298094"/>
                   </a:lnTo>
                   <a:lnTo>
-                    <a:pt x="615702" y="2290975"/>
+                    <a:pt x="615702" y="2290976"/>
                   </a:lnTo>
                   <a:lnTo>
                     <a:pt x="629087" y="2283821"/>
@@ -10859,7 +10859,7 @@
                     <a:pt x="709396" y="2238520"/>
                   </a:lnTo>
                   <a:lnTo>
-                    <a:pt x="722780" y="2230295"/>
+                    <a:pt x="722780" y="2230296"/>
                   </a:lnTo>
                   <a:lnTo>
                     <a:pt x="736165" y="2221688"/>
@@ -10871,13 +10871,13 @@
                     <a:pt x="762935" y="2203522"/>
                   </a:lnTo>
                   <a:lnTo>
-                    <a:pt x="776320" y="2193920"/>
+                    <a:pt x="776320" y="2193921"/>
                   </a:lnTo>
                   <a:lnTo>
                     <a:pt x="789705" y="2183806"/>
                   </a:lnTo>
                   <a:lnTo>
-                    <a:pt x="803089" y="2173226"/>
+                    <a:pt x="803089" y="2173227"/>
                   </a:lnTo>
                   <a:lnTo>
                     <a:pt x="816474" y="2162206"/>
@@ -10889,10 +10889,10 @@
                     <a:pt x="843244" y="2138672"/>
                   </a:lnTo>
                   <a:lnTo>
-                    <a:pt x="856629" y="2125996"/>
-                  </a:lnTo>
-                  <a:lnTo>
-                    <a:pt x="870014" y="2112801"/>
+                    <a:pt x="856629" y="2125997"/>
+                  </a:lnTo>
+                  <a:lnTo>
+                    <a:pt x="870014" y="2112802"/>
                   </a:lnTo>
                   <a:lnTo>
                     <a:pt x="883398" y="2099078"/>
@@ -10901,10 +10901,10 @@
                     <a:pt x="896783" y="2084774"/>
                   </a:lnTo>
                   <a:lnTo>
-                    <a:pt x="910168" y="2069722"/>
-                  </a:lnTo>
-                  <a:lnTo>
-                    <a:pt x="923553" y="2054115"/>
+                    <a:pt x="910168" y="2069723"/>
+                  </a:lnTo>
+                  <a:lnTo>
+                    <a:pt x="923553" y="2054116"/>
                   </a:lnTo>
                   <a:lnTo>
                     <a:pt x="936938" y="2037952"/>
@@ -10916,7 +10916,7 @@
                     <a:pt x="963707" y="2003741"/>
                   </a:lnTo>
                   <a:lnTo>
-                    <a:pt x="977092" y="1985677"/>
+                    <a:pt x="977092" y="1985678"/>
                   </a:lnTo>
                   <a:lnTo>
                     <a:pt x="990477" y="1967075"/>
@@ -10937,7 +10937,7 @@
                     <a:pt x="1057401" y="1865619"/>
                   </a:lnTo>
                   <a:lnTo>
-                    <a:pt x="1070786" y="1843797"/>
+                    <a:pt x="1070786" y="1843798"/>
                   </a:lnTo>
                   <a:lnTo>
                     <a:pt x="1084171" y="1821435"/>
@@ -10949,28 +10949,28 @@
                     <a:pt x="1110941" y="1775563"/>
                   </a:lnTo>
                   <a:lnTo>
-                    <a:pt x="1124325" y="1752087"/>
-                  </a:lnTo>
-                  <a:lnTo>
-                    <a:pt x="1137710" y="1728161"/>
-                  </a:lnTo>
-                  <a:lnTo>
-                    <a:pt x="1151095" y="1703953"/>
+                    <a:pt x="1124325" y="1752088"/>
+                  </a:lnTo>
+                  <a:lnTo>
+                    <a:pt x="1137710" y="1728162"/>
+                  </a:lnTo>
+                  <a:lnTo>
+                    <a:pt x="1151095" y="1703954"/>
                   </a:lnTo>
                   <a:lnTo>
                     <a:pt x="1164480" y="1679483"/>
                   </a:lnTo>
                   <a:lnTo>
-                    <a:pt x="1177865" y="1654769"/>
-                  </a:lnTo>
-                  <a:lnTo>
-                    <a:pt x="1191250" y="1629773"/>
+                    <a:pt x="1177865" y="1654770"/>
+                  </a:lnTo>
+                  <a:lnTo>
+                    <a:pt x="1191250" y="1629774"/>
                   </a:lnTo>
                   <a:lnTo>
                     <a:pt x="1204634" y="1604575"/>
                   </a:lnTo>
                   <a:lnTo>
-                    <a:pt x="1218019" y="1579215"/>
+                    <a:pt x="1218019" y="1579216"/>
                   </a:lnTo>
                   <a:lnTo>
                     <a:pt x="1231404" y="1553711"/>
@@ -10979,7 +10979,7 @@
                     <a:pt x="1244789" y="1528058"/>
                   </a:lnTo>
                   <a:lnTo>
-                    <a:pt x="1258174" y="1502280"/>
+                    <a:pt x="1258174" y="1502281"/>
                   </a:lnTo>
                   <a:lnTo>
                     <a:pt x="1271559" y="1476420"/>
@@ -11000,10 +11000,10 @@
                     <a:pt x="1338483" y="1346191"/>
                   </a:lnTo>
                   <a:lnTo>
-                    <a:pt x="1351868" y="1320025"/>
-                  </a:lnTo>
-                  <a:lnTo>
-                    <a:pt x="1365252" y="1293821"/>
+                    <a:pt x="1351868" y="1320026"/>
+                  </a:lnTo>
+                  <a:lnTo>
+                    <a:pt x="1365252" y="1293822"/>
                   </a:lnTo>
                   <a:lnTo>
                     <a:pt x="1378637" y="1267589"/>
@@ -11012,10 +11012,10 @@
                     <a:pt x="1392022" y="1241327"/>
                   </a:lnTo>
                   <a:lnTo>
-                    <a:pt x="1405407" y="1215034"/>
-                  </a:lnTo>
-                  <a:lnTo>
-                    <a:pt x="1418792" y="1188698"/>
+                    <a:pt x="1405407" y="1215035"/>
+                  </a:lnTo>
+                  <a:lnTo>
+                    <a:pt x="1418792" y="1188699"/>
                   </a:lnTo>
                   <a:lnTo>
                     <a:pt x="1432177" y="1162315"/>
@@ -11030,13 +11030,13 @@
                     <a:pt x="1472331" y="1082874"/>
                   </a:lnTo>
                   <a:lnTo>
-                    <a:pt x="1485716" y="1056262"/>
-                  </a:lnTo>
-                  <a:lnTo>
-                    <a:pt x="1499101" y="1029590"/>
-                  </a:lnTo>
-                  <a:lnTo>
-                    <a:pt x="1512486" y="1002857"/>
+                    <a:pt x="1485716" y="1056263"/>
+                  </a:lnTo>
+                  <a:lnTo>
+                    <a:pt x="1499101" y="1029591"/>
+                  </a:lnTo>
+                  <a:lnTo>
+                    <a:pt x="1512486" y="1002858"/>
                   </a:lnTo>
                   <a:lnTo>
                     <a:pt x="1525870" y="976063"/>
@@ -11045,7 +11045,7 @@
                     <a:pt x="1539255" y="949186"/>
                   </a:lnTo>
                   <a:lnTo>
-                    <a:pt x="1552640" y="922258"/>
+                    <a:pt x="1552640" y="922259"/>
                   </a:lnTo>
                   <a:lnTo>
                     <a:pt x="1566025" y="895288"/>
@@ -11054,13 +11054,13 @@
                     <a:pt x="1579410" y="868283"/>
                   </a:lnTo>
                   <a:lnTo>
-                    <a:pt x="1592795" y="841252"/>
+                    <a:pt x="1592795" y="841253"/>
                   </a:lnTo>
                   <a:lnTo>
                     <a:pt x="1606179" y="814229"/>
                   </a:lnTo>
                   <a:lnTo>
-                    <a:pt x="1619564" y="787231"/>
+                    <a:pt x="1619564" y="787232"/>
                   </a:lnTo>
                   <a:lnTo>
                     <a:pt x="1632949" y="760280"/>
@@ -11078,7 +11078,7 @@
                     <a:pt x="1686488" y="653772"/>
                   </a:lnTo>
                   <a:lnTo>
-                    <a:pt x="1699873" y="627640"/>
+                    <a:pt x="1699873" y="627641"/>
                   </a:lnTo>
                   <a:lnTo>
                     <a:pt x="1713258" y="601900"/>
@@ -11093,7 +11093,7 @@
                     <a:pt x="1753413" y="526911"/>
                   </a:lnTo>
                   <a:lnTo>
-                    <a:pt x="1766797" y="502999"/>
+                    <a:pt x="1766797" y="503000"/>
                   </a:lnTo>
                   <a:lnTo>
                     <a:pt x="1780182" y="479688"/>
@@ -11177,7 +11177,7 @@
                     <a:pt x="2128188" y="213138"/>
                   </a:lnTo>
                   <a:lnTo>
-                    <a:pt x="2141573" y="215513"/>
+                    <a:pt x="2141573" y="215514"/>
                   </a:lnTo>
                   <a:lnTo>
                     <a:pt x="2154958" y="218310"/>
@@ -11228,7 +11228,7 @@
                     <a:pt x="2355730" y="251906"/>
                   </a:lnTo>
                   <a:lnTo>
-                    <a:pt x="2369115" y="250053"/>
+                    <a:pt x="2369115" y="250054"/>
                   </a:lnTo>
                   <a:lnTo>
                     <a:pt x="2382500" y="247476"/>
@@ -11342,7 +11342,7 @@
                     <a:pt x="2864354" y="15109"/>
                   </a:lnTo>
                   <a:lnTo>
-                    <a:pt x="2877739" y="22077"/>
+                    <a:pt x="2877739" y="22078"/>
                   </a:lnTo>
                   <a:lnTo>
                     <a:pt x="2891123" y="30225"/>
@@ -11366,7 +11366,7 @@
                     <a:pt x="2971432" y="105153"/>
                   </a:lnTo>
                   <a:lnTo>
-                    <a:pt x="2984817" y="121530"/>
+                    <a:pt x="2984817" y="121531"/>
                   </a:lnTo>
                   <a:lnTo>
                     <a:pt x="2998202" y="138747"/>
@@ -11375,19 +11375,19 @@
                     <a:pt x="3011587" y="156756"/>
                   </a:lnTo>
                   <a:lnTo>
-                    <a:pt x="3024972" y="175653"/>
-                  </a:lnTo>
-                  <a:lnTo>
-                    <a:pt x="3038357" y="195319"/>
-                  </a:lnTo>
-                  <a:lnTo>
-                    <a:pt x="3051741" y="215548"/>
+                    <a:pt x="3024972" y="175654"/>
+                  </a:lnTo>
+                  <a:lnTo>
+                    <a:pt x="3038357" y="195320"/>
+                  </a:lnTo>
+                  <a:lnTo>
+                    <a:pt x="3051741" y="215549"/>
                   </a:lnTo>
                   <a:lnTo>
                     <a:pt x="3065126" y="236287"/>
                   </a:lnTo>
                   <a:lnTo>
-                    <a:pt x="3078511" y="257517"/>
+                    <a:pt x="3078511" y="257518"/>
                   </a:lnTo>
                   <a:lnTo>
                     <a:pt x="3091896" y="279219"/>
@@ -11399,52 +11399,52 @@
                     <a:pt x="3118666" y="323375"/>
                   </a:lnTo>
                   <a:lnTo>
-                    <a:pt x="3132050" y="345726"/>
+                    <a:pt x="3132050" y="345727"/>
                   </a:lnTo>
                   <a:lnTo>
                     <a:pt x="3145435" y="368190"/>
                   </a:lnTo>
                   <a:lnTo>
-                    <a:pt x="3158820" y="390649"/>
-                  </a:lnTo>
-                  <a:lnTo>
-                    <a:pt x="3172205" y="413059"/>
+                    <a:pt x="3158820" y="390650"/>
+                  </a:lnTo>
+                  <a:lnTo>
+                    <a:pt x="3172205" y="413060"/>
                   </a:lnTo>
                   <a:lnTo>
                     <a:pt x="3185590" y="435377"/>
                   </a:lnTo>
                   <a:lnTo>
-                    <a:pt x="3198975" y="457497"/>
-                  </a:lnTo>
-                  <a:lnTo>
-                    <a:pt x="3212359" y="479367"/>
-                  </a:lnTo>
-                  <a:lnTo>
-                    <a:pt x="3225744" y="500979"/>
+                    <a:pt x="3198975" y="457498"/>
+                  </a:lnTo>
+                  <a:lnTo>
+                    <a:pt x="3212359" y="479368"/>
+                  </a:lnTo>
+                  <a:lnTo>
+                    <a:pt x="3225744" y="500980"/>
                   </a:lnTo>
                   <a:lnTo>
                     <a:pt x="3239129" y="522304"/>
                   </a:lnTo>
                   <a:lnTo>
-                    <a:pt x="3252514" y="543254"/>
-                  </a:lnTo>
-                  <a:lnTo>
-                    <a:pt x="3265899" y="563742"/>
-                  </a:lnTo>
-                  <a:lnTo>
-                    <a:pt x="3279284" y="583842"/>
-                  </a:lnTo>
-                  <a:lnTo>
-                    <a:pt x="3292668" y="603540"/>
-                  </a:lnTo>
-                  <a:lnTo>
-                    <a:pt x="3306053" y="622809"/>
-                  </a:lnTo>
-                  <a:lnTo>
-                    <a:pt x="3319438" y="641478"/>
-                  </a:lnTo>
-                  <a:lnTo>
-                    <a:pt x="3332823" y="659715"/>
+                    <a:pt x="3252514" y="543255"/>
+                  </a:lnTo>
+                  <a:lnTo>
+                    <a:pt x="3265899" y="563743"/>
+                  </a:lnTo>
+                  <a:lnTo>
+                    <a:pt x="3279284" y="583843"/>
+                  </a:lnTo>
+                  <a:lnTo>
+                    <a:pt x="3292668" y="603541"/>
+                  </a:lnTo>
+                  <a:lnTo>
+                    <a:pt x="3306053" y="622810"/>
+                  </a:lnTo>
+                  <a:lnTo>
+                    <a:pt x="3319438" y="641479"/>
+                  </a:lnTo>
+                  <a:lnTo>
+                    <a:pt x="3332823" y="659716"/>
                   </a:lnTo>
                   <a:lnTo>
                     <a:pt x="3346208" y="677523"/>
@@ -11453,7 +11453,7 @@
                     <a:pt x="3359593" y="694904"/>
                   </a:lnTo>
                   <a:lnTo>
-                    <a:pt x="3372977" y="711726"/>
+                    <a:pt x="3372977" y="711727"/>
                   </a:lnTo>
                   <a:lnTo>
                     <a:pt x="3386362" y="728117"/>
@@ -11462,10 +11462,10 @@
                     <a:pt x="3399747" y="744129"/>
                   </a:lnTo>
                   <a:lnTo>
-                    <a:pt x="3413132" y="759778"/>
-                  </a:lnTo>
-                  <a:lnTo>
-                    <a:pt x="3426517" y="775017"/>
+                    <a:pt x="3413132" y="759779"/>
+                  </a:lnTo>
+                  <a:lnTo>
+                    <a:pt x="3426517" y="775018"/>
                   </a:lnTo>
                   <a:lnTo>
                     <a:pt x="3439902" y="789891"/>
@@ -11486,10 +11486,10 @@
                     <a:pt x="3506826" y="860666"/>
                   </a:lnTo>
                   <a:lnTo>
-                    <a:pt x="3520211" y="874342"/>
-                  </a:lnTo>
-                  <a:lnTo>
-                    <a:pt x="3533595" y="887945"/>
+                    <a:pt x="3520211" y="874343"/>
+                  </a:lnTo>
+                  <a:lnTo>
+                    <a:pt x="3533595" y="887946"/>
                   </a:lnTo>
                   <a:lnTo>
                     <a:pt x="3546980" y="901506"/>
@@ -11498,22 +11498,22 @@
                     <a:pt x="3560365" y="915080"/>
                   </a:lnTo>
                   <a:lnTo>
-                    <a:pt x="3573750" y="928690"/>
-                  </a:lnTo>
-                  <a:lnTo>
-                    <a:pt x="3587135" y="942358"/>
-                  </a:lnTo>
-                  <a:lnTo>
-                    <a:pt x="3600520" y="956138"/>
-                  </a:lnTo>
-                  <a:lnTo>
-                    <a:pt x="3613904" y="970055"/>
+                    <a:pt x="3573750" y="928691"/>
+                  </a:lnTo>
+                  <a:lnTo>
+                    <a:pt x="3587135" y="942359"/>
+                  </a:lnTo>
+                  <a:lnTo>
+                    <a:pt x="3600520" y="956139"/>
+                  </a:lnTo>
+                  <a:lnTo>
+                    <a:pt x="3613904" y="970056"/>
                   </a:lnTo>
                   <a:lnTo>
                     <a:pt x="3627289" y="984109"/>
                   </a:lnTo>
                   <a:lnTo>
-                    <a:pt x="3640674" y="998311"/>
+                    <a:pt x="3640674" y="998312"/>
                   </a:lnTo>
                   <a:lnTo>
                     <a:pt x="3654059" y="1012702"/>
@@ -11522,13 +11522,13 @@
                     <a:pt x="3667444" y="1027319"/>
                   </a:lnTo>
                   <a:lnTo>
-                    <a:pt x="3680829" y="1042119"/>
+                    <a:pt x="3680829" y="1042120"/>
                   </a:lnTo>
                   <a:lnTo>
                     <a:pt x="3694213" y="1057105"/>
                   </a:lnTo>
                   <a:lnTo>
-                    <a:pt x="3707598" y="1072281"/>
+                    <a:pt x="3707598" y="1072282"/>
                   </a:lnTo>
                   <a:lnTo>
                     <a:pt x="3720983" y="1087715"/>
@@ -11555,7 +11555,7 @@
                     <a:pt x="3814677" y="1200207"/>
                   </a:lnTo>
                   <a:lnTo>
-                    <a:pt x="3828062" y="1216745"/>
+                    <a:pt x="3828062" y="1216746"/>
                   </a:lnTo>
                   <a:lnTo>
                     <a:pt x="3841447" y="1233342"/>
@@ -11606,10 +11606,10 @@
                     <a:pt x="4042219" y="1477611"/>
                   </a:lnTo>
                   <a:lnTo>
-                    <a:pt x="4055604" y="1493262"/>
-                  </a:lnTo>
-                  <a:lnTo>
-                    <a:pt x="4068989" y="1508846"/>
+                    <a:pt x="4055604" y="1493263"/>
+                  </a:lnTo>
+                  <a:lnTo>
+                    <a:pt x="4068989" y="1508847"/>
                   </a:lnTo>
                   <a:lnTo>
                     <a:pt x="4082374" y="1524393"/>
@@ -11630,7 +11630,7 @@
                     <a:pt x="4149298" y="1602005"/>
                   </a:lnTo>
                   <a:lnTo>
-                    <a:pt x="4162683" y="1617608"/>
+                    <a:pt x="4162683" y="1617609"/>
                   </a:lnTo>
                   <a:lnTo>
                     <a:pt x="4176067" y="1633293"/>
@@ -11657,7 +11657,7 @@
                     <a:pt x="4269761" y="1745913"/>
                   </a:lnTo>
                   <a:lnTo>
-                    <a:pt x="4283146" y="1762472"/>
+                    <a:pt x="4283146" y="1762473"/>
                   </a:lnTo>
                   <a:lnTo>
                     <a:pt x="4296531" y="1779180"/>
@@ -11669,16 +11669,16 @@
                     <a:pt x="4323301" y="1812886"/>
                   </a:lnTo>
                   <a:lnTo>
-                    <a:pt x="4336685" y="1829870"/>
-                  </a:lnTo>
-                  <a:lnTo>
-                    <a:pt x="4350070" y="1846948"/>
-                  </a:lnTo>
-                  <a:lnTo>
-                    <a:pt x="4363455" y="1864074"/>
-                  </a:lnTo>
-                  <a:lnTo>
-                    <a:pt x="4376840" y="1881230"/>
+                    <a:pt x="4336685" y="1829871"/>
+                  </a:lnTo>
+                  <a:lnTo>
+                    <a:pt x="4350070" y="1846949"/>
+                  </a:lnTo>
+                  <a:lnTo>
+                    <a:pt x="4363455" y="1864075"/>
+                  </a:lnTo>
+                  <a:lnTo>
+                    <a:pt x="4376840" y="1881231"/>
                   </a:lnTo>
                   <a:lnTo>
                     <a:pt x="4390225" y="1898402"/>
@@ -11690,7 +11690,7 @@
                     <a:pt x="4416994" y="1932680"/>
                   </a:lnTo>
                   <a:lnTo>
-                    <a:pt x="4430379" y="1949734"/>
+                    <a:pt x="4430379" y="1949735"/>
                   </a:lnTo>
                   <a:lnTo>
                     <a:pt x="4443764" y="1966708"/>
@@ -11714,7 +11714,7 @@
                     <a:pt x="4524073" y="2064980"/>
                   </a:lnTo>
                   <a:lnTo>
-                    <a:pt x="4537458" y="2080506"/>
+                    <a:pt x="4537458" y="2080507"/>
                   </a:lnTo>
                   <a:lnTo>
                     <a:pt x="4550843" y="2095759"/>
@@ -11741,10 +11741,10 @@
                     <a:pt x="4644537" y="2192671"/>
                   </a:lnTo>
                   <a:lnTo>
-                    <a:pt x="4657921" y="2205006"/>
-                  </a:lnTo>
-                  <a:lnTo>
-                    <a:pt x="4671306" y="2216996"/>
+                    <a:pt x="4657921" y="2205007"/>
+                  </a:lnTo>
+                  <a:lnTo>
+                    <a:pt x="4671306" y="2216997"/>
                   </a:lnTo>
                   <a:lnTo>
                     <a:pt x="4684691" y="2228620"/>
@@ -11771,13 +11771,13 @@
                     <a:pt x="4778385" y="2300187"/>
                   </a:lnTo>
                   <a:lnTo>
-                    <a:pt x="4791770" y="2309295"/>
+                    <a:pt x="4791770" y="2309296"/>
                   </a:lnTo>
                   <a:lnTo>
                     <a:pt x="4805155" y="2318145"/>
                   </a:lnTo>
                   <a:lnTo>
-                    <a:pt x="4818539" y="2326782"/>
+                    <a:pt x="4818539" y="2326783"/>
                   </a:lnTo>
                   <a:lnTo>
                     <a:pt x="4831924" y="2335262"/>
@@ -11789,13 +11789,13 @@
                     <a:pt x="4858694" y="2351794"/>
                   </a:lnTo>
                   <a:lnTo>
-                    <a:pt x="4872079" y="2359861"/>
+                    <a:pt x="4872079" y="2359862"/>
                   </a:lnTo>
                   <a:lnTo>
                     <a:pt x="4885464" y="2367853"/>
                   </a:lnTo>
                   <a:lnTo>
-                    <a:pt x="4898848" y="2375781"/>
+                    <a:pt x="4898848" y="2375782"/>
                   </a:lnTo>
                   <a:lnTo>
                     <a:pt x="4912233" y="2383660"/>
@@ -11813,10 +11813,10 @@
                     <a:pt x="4965773" y="2414970"/>
                   </a:lnTo>
                   <a:lnTo>
-                    <a:pt x="4979157" y="2422818"/>
-                  </a:lnTo>
-                  <a:lnTo>
-                    <a:pt x="4992542" y="2430694"/>
+                    <a:pt x="4979157" y="2422819"/>
+                  </a:lnTo>
+                  <a:lnTo>
+                    <a:pt x="4992542" y="2430695"/>
                   </a:lnTo>
                   <a:lnTo>
                     <a:pt x="5005927" y="2438599"/>
@@ -11831,7 +11831,7 @@
                     <a:pt x="5046082" y="2462524"/>
                   </a:lnTo>
                   <a:lnTo>
-                    <a:pt x="5059466" y="2470568"/>
+                    <a:pt x="5059466" y="2470569"/>
                   </a:lnTo>
                   <a:lnTo>
                     <a:pt x="5072851" y="2478639"/>
@@ -11843,28 +11843,28 @@
                     <a:pt x="5099621" y="2494849"/>
                   </a:lnTo>
                   <a:lnTo>
-                    <a:pt x="5113006" y="2502968"/>
+                    <a:pt x="5113006" y="2502969"/>
                   </a:lnTo>
                   <a:lnTo>
                     <a:pt x="5126391" y="2511086"/>
                   </a:lnTo>
                   <a:lnTo>
-                    <a:pt x="5139775" y="2519194"/>
-                  </a:lnTo>
-                  <a:lnTo>
-                    <a:pt x="5153160" y="2527273"/>
+                    <a:pt x="5139775" y="2519195"/>
+                  </a:lnTo>
+                  <a:lnTo>
+                    <a:pt x="5153160" y="2527274"/>
                   </a:lnTo>
                   <a:lnTo>
                     <a:pt x="5166545" y="2535315"/>
                   </a:lnTo>
                   <a:lnTo>
-                    <a:pt x="5179930" y="2543311"/>
+                    <a:pt x="5179930" y="2543312"/>
                   </a:lnTo>
                   <a:lnTo>
                     <a:pt x="5193315" y="2551255"/>
                   </a:lnTo>
                   <a:lnTo>
-                    <a:pt x="5206700" y="2559116"/>
+                    <a:pt x="5206700" y="2559117"/>
                   </a:lnTo>
                   <a:lnTo>
                     <a:pt x="5220084" y="2566883"/>
@@ -11873,10 +11873,10 @@
                     <a:pt x="5233469" y="2574559"/>
                   </a:lnTo>
                   <a:lnTo>
-                    <a:pt x="5246854" y="2582136"/>
-                  </a:lnTo>
-                  <a:lnTo>
-                    <a:pt x="5260239" y="2589592"/>
+                    <a:pt x="5246854" y="2582137"/>
+                  </a:lnTo>
+                  <a:lnTo>
+                    <a:pt x="5260239" y="2589593"/>
                   </a:lnTo>
                   <a:lnTo>
                     <a:pt x="5273624" y="2596890"/>
@@ -11891,7 +11891,7 @@
                     <a:pt x="5313778" y="2617976"/>
                   </a:lnTo>
                   <a:lnTo>
-                    <a:pt x="5327163" y="2624648"/>
+                    <a:pt x="5327163" y="2624649"/>
                   </a:lnTo>
                   <a:lnTo>
                     <a:pt x="5340548" y="2631162"/>
@@ -11903,7 +11903,7 @@
                     <a:pt x="5367318" y="2643702"/>
                   </a:lnTo>
                   <a:lnTo>
-                    <a:pt x="5380702" y="2649669"/>
+                    <a:pt x="5380702" y="2649670"/>
                   </a:lnTo>
                   <a:lnTo>
                     <a:pt x="5394087" y="2655444"/>
@@ -11918,16 +11918,16 @@
                     <a:pt x="5434242" y="2671703"/>
                   </a:lnTo>
                   <a:lnTo>
-                    <a:pt x="5447627" y="2676713"/>
+                    <a:pt x="5447627" y="2676714"/>
                   </a:lnTo>
                   <a:lnTo>
                     <a:pt x="5461011" y="2681554"/>
                   </a:lnTo>
                   <a:lnTo>
-                    <a:pt x="5474396" y="2686225"/>
-                  </a:lnTo>
-                  <a:lnTo>
-                    <a:pt x="5487781" y="2690720"/>
+                    <a:pt x="5474396" y="2686226"/>
+                  </a:lnTo>
+                  <a:lnTo>
+                    <a:pt x="5487781" y="2690721"/>
                   </a:lnTo>
                   <a:lnTo>
                     <a:pt x="5501166" y="2694990"/>
@@ -11951,16 +11951,16 @@
                     <a:pt x="5581475" y="2717186"/>
                   </a:lnTo>
                   <a:lnTo>
-                    <a:pt x="5594860" y="2720347"/>
-                  </a:lnTo>
-                  <a:lnTo>
-                    <a:pt x="5608245" y="2723343"/>
-                  </a:lnTo>
-                  <a:lnTo>
-                    <a:pt x="5621629" y="2726186"/>
-                  </a:lnTo>
-                  <a:lnTo>
-                    <a:pt x="5635014" y="2728905"/>
+                    <a:pt x="5594860" y="2720348"/>
+                  </a:lnTo>
+                  <a:lnTo>
+                    <a:pt x="5608245" y="2723344"/>
+                  </a:lnTo>
+                  <a:lnTo>
+                    <a:pt x="5621629" y="2726187"/>
+                  </a:lnTo>
+                  <a:lnTo>
+                    <a:pt x="5635014" y="2728906"/>
                   </a:lnTo>
                   <a:lnTo>
                     <a:pt x="5648399" y="2731504"/>
@@ -11969,16 +11969,16 @@
                     <a:pt x="5661784" y="2733972"/>
                   </a:lnTo>
                   <a:lnTo>
-                    <a:pt x="5675169" y="2736291"/>
-                  </a:lnTo>
-                  <a:lnTo>
-                    <a:pt x="5688554" y="2738503"/>
+                    <a:pt x="5675169" y="2736292"/>
+                  </a:lnTo>
+                  <a:lnTo>
+                    <a:pt x="5688554" y="2738504"/>
                   </a:lnTo>
                   <a:lnTo>
                     <a:pt x="5701938" y="2740611"/>
                   </a:lnTo>
                   <a:lnTo>
-                    <a:pt x="5715323" y="2742616"/>
+                    <a:pt x="5715323" y="2742617"/>
                   </a:lnTo>
                   <a:lnTo>
                     <a:pt x="5728708" y="2744483"/>
@@ -11993,13 +11993,13 @@
                     <a:pt x="5768863" y="2749534"/>
                   </a:lnTo>
                   <a:lnTo>
-                    <a:pt x="5782247" y="2751019"/>
-                  </a:lnTo>
-                  <a:lnTo>
-                    <a:pt x="5795632" y="2752414"/>
-                  </a:lnTo>
-                  <a:lnTo>
-                    <a:pt x="5809017" y="2753732"/>
+                    <a:pt x="5782247" y="2751020"/>
+                  </a:lnTo>
+                  <a:lnTo>
+                    <a:pt x="5795632" y="2752415"/>
+                  </a:lnTo>
+                  <a:lnTo>
+                    <a:pt x="5809017" y="2753733"/>
                   </a:lnTo>
                   <a:lnTo>
                     <a:pt x="5822402" y="2754976"/>
@@ -12017,13 +12017,13 @@
                     <a:pt x="5875941" y="2759163"/>
                   </a:lnTo>
                   <a:lnTo>
-                    <a:pt x="5889326" y="2760045"/>
-                  </a:lnTo>
-                  <a:lnTo>
-                    <a:pt x="5902711" y="2760849"/>
-                  </a:lnTo>
-                  <a:lnTo>
-                    <a:pt x="5916096" y="2761600"/>
+                    <a:pt x="5889326" y="2760046"/>
+                  </a:lnTo>
+                  <a:lnTo>
+                    <a:pt x="5902711" y="2760850"/>
+                  </a:lnTo>
+                  <a:lnTo>
+                    <a:pt x="5916096" y="2761601"/>
                   </a:lnTo>
                   <a:lnTo>
                     <a:pt x="5929481" y="2762300"/>
@@ -12053,13 +12053,13 @@
                     <a:pt x="6036559" y="2766188"/>
                   </a:lnTo>
                   <a:lnTo>
-                    <a:pt x="6049944" y="2766505"/>
-                  </a:lnTo>
-                  <a:lnTo>
-                    <a:pt x="6063329" y="2766792"/>
-                  </a:lnTo>
-                  <a:lnTo>
-                    <a:pt x="6076714" y="2767046"/>
+                    <a:pt x="6049944" y="2766506"/>
+                  </a:lnTo>
+                  <a:lnTo>
+                    <a:pt x="6063329" y="2766793"/>
+                  </a:lnTo>
+                  <a:lnTo>
+                    <a:pt x="6076714" y="2767047"/>
                   </a:lnTo>
                   <a:lnTo>
                     <a:pt x="6090099" y="2767278"/>
@@ -12074,7 +12074,7 @@
                     <a:pt x="6130253" y="2767842"/>
                   </a:lnTo>
                   <a:lnTo>
-                    <a:pt x="6143638" y="2767990"/>
+                    <a:pt x="6143638" y="2767991"/>
                   </a:lnTo>
                   <a:lnTo>
                     <a:pt x="6157023" y="2768124"/>
@@ -12086,7 +12086,7 @@
                     <a:pt x="6183792" y="2768347"/>
                   </a:lnTo>
                   <a:lnTo>
-                    <a:pt x="6197177" y="2768438"/>
+                    <a:pt x="6197177" y="2768439"/>
                   </a:lnTo>
                   <a:lnTo>
                     <a:pt x="6210562" y="2768520"/>
@@ -12101,28 +12101,28 @@
                     <a:pt x="6250717" y="2768709"/>
                   </a:lnTo>
                   <a:lnTo>
-                    <a:pt x="6264101" y="2768756"/>
-                  </a:lnTo>
-                  <a:lnTo>
-                    <a:pt x="6277486" y="2768798"/>
+                    <a:pt x="6264101" y="2768757"/>
+                  </a:lnTo>
+                  <a:lnTo>
+                    <a:pt x="6277486" y="2768799"/>
                   </a:lnTo>
                   <a:lnTo>
                     <a:pt x="6290871" y="2768835"/>
                   </a:lnTo>
                   <a:lnTo>
-                    <a:pt x="6304256" y="2768865"/>
+                    <a:pt x="6304256" y="2768866"/>
                   </a:lnTo>
                   <a:lnTo>
                     <a:pt x="6317641" y="2768892"/>
                   </a:lnTo>
                   <a:lnTo>
-                    <a:pt x="6331026" y="2768915"/>
+                    <a:pt x="6331026" y="2768916"/>
                   </a:lnTo>
                   <a:lnTo>
                     <a:pt x="6344410" y="2768936"/>
                   </a:lnTo>
                   <a:lnTo>
-                    <a:pt x="6357795" y="2768952"/>
+                    <a:pt x="6357795" y="2768953"/>
                   </a:lnTo>
                   <a:lnTo>
                     <a:pt x="6371180" y="2768967"/>
@@ -12155,13 +12155,13 @@
                     <a:pt x="6491644" y="2769029"/>
                   </a:lnTo>
                   <a:lnTo>
-                    <a:pt x="6505028" y="2769031"/>
+                    <a:pt x="6505028" y="2769032"/>
                   </a:lnTo>
                   <a:lnTo>
                     <a:pt x="6518413" y="2769034"/>
                   </a:lnTo>
                   <a:lnTo>
-                    <a:pt x="6531798" y="2769035"/>
+                    <a:pt x="6531798" y="2769036"/>
                   </a:lnTo>
                   <a:lnTo>
                     <a:pt x="6545183" y="2769037"/>
@@ -12176,13 +12176,13 @@
                     <a:pt x="6585337" y="2769040"/>
                   </a:lnTo>
                   <a:lnTo>
-                    <a:pt x="6598722" y="2769040"/>
+                    <a:pt x="6598722" y="2769041"/>
                   </a:lnTo>
                   <a:lnTo>
                     <a:pt x="6612107" y="2769041"/>
                   </a:lnTo>
                   <a:lnTo>
-                    <a:pt x="6625492" y="2769041"/>
+                    <a:pt x="6625492" y="2769042"/>
                   </a:lnTo>
                   <a:lnTo>
                     <a:pt x="6638877" y="2769042"/>
@@ -12194,7 +12194,7 @@
                     <a:pt x="6665646" y="2769042"/>
                   </a:lnTo>
                   <a:lnTo>
-                    <a:pt x="6679031" y="2769042"/>
+                    <a:pt x="6679031" y="2769043"/>
                   </a:lnTo>
                   <a:lnTo>
                     <a:pt x="6692416" y="2769043"/>
